--- a/슬라이드/BM_16주차_강의덱.pptx
+++ b/슬라이드/BM_16주차_강의덱.pptx
@@ -3164,7 +3164,7 @@
         <p:spPr>
           <a:xfrm>
             <a:off x="640080" y="5989320"/>
-            <a:ext cx="8229600" cy="365760"/>
+            <a:ext cx="9601200" cy="365760"/>
           </a:xfrm>
           <a:prstGeom prst="rect">
             <a:avLst/>
@@ -3188,7 +3188,7 @@
                 <a:ea typeface="Pretendard" pitchFamily="34" charset="-122"/>
                 <a:cs typeface="Pretendard" pitchFamily="34" charset="-120"/>
               </a:rPr>
-              <a:t>기획 파트 · 16주차 BM 세션 · 60~80분 · 3명씩 2팀</a:t>
+              <a:t>기획 파트 · 16주차 BM 세션 · 기획 입문자 대상 · 60~80분 · 3명씩 2팀</a:t>
             </a:r>
             <a:endParaRPr lang="en-US" sz="1300" dirty="0"/>
           </a:p>
@@ -4247,7 +4247,46 @@
       </p:sp>
       <p:sp>
         <p:nvSpPr>
-          <p:cNvPr id="7" name="Shape 5"/>
+          <p:cNvPr id="7" name="Text 5"/>
+          <p:cNvSpPr/>
+          <p:nvPr/>
+        </p:nvSpPr>
+        <p:spPr>
+          <a:xfrm>
+            <a:off x="640080" y="2121408"/>
+            <a:ext cx="10908792" cy="274320"/>
+          </a:xfrm>
+          <a:prstGeom prst="rect">
+            <a:avLst/>
+          </a:prstGeom>
+          <a:noFill/>
+          <a:ln/>
+        </p:spPr>
+        <p:txBody>
+          <a:bodyPr wrap="square" lIns="0" tIns="0" rIns="0" bIns="0" rtlCol="0" anchor="ctr"/>
+          <a:lstStyle/>
+          <a:p>
+            <a:pPr indent="0" marL="0">
+              <a:buNone/>
+            </a:pPr>
+            <a:r>
+              <a:rPr lang="en-US" sz="1400" dirty="0">
+                <a:solidFill>
+                  <a:srgbClr val="4F4F4F"/>
+                </a:solidFill>
+                <a:latin typeface="Pretendard" pitchFamily="34" charset="0"/>
+                <a:ea typeface="Pretendard" pitchFamily="34" charset="-122"/>
+                <a:cs typeface="Pretendard" pitchFamily="34" charset="-120"/>
+              </a:rPr>
+              <a:t>‘돈 될 것 같은 방식’이 아니라 ‘고객 행동·비용 구조에 맞는 방식’을 고릅니다.</a:t>
+            </a:r>
+            <a:endParaRPr lang="en-US" sz="1400" dirty="0"/>
+          </a:p>
+        </p:txBody>
+      </p:sp>
+      <p:sp>
+        <p:nvSpPr>
+          <p:cNvPr id="8" name="Shape 6"/>
           <p:cNvSpPr/>
           <p:nvPr/>
         </p:nvSpPr>
@@ -4281,7 +4320,7 @@
       </p:sp>
       <p:sp>
         <p:nvSpPr>
-          <p:cNvPr id="8" name="Shape 6"/>
+          <p:cNvPr id="9" name="Shape 7"/>
           <p:cNvSpPr/>
           <p:nvPr/>
         </p:nvSpPr>
@@ -4301,7 +4340,7 @@
       </p:sp>
       <p:sp>
         <p:nvSpPr>
-          <p:cNvPr id="9" name="Text 7"/>
+          <p:cNvPr id="10" name="Text 8"/>
           <p:cNvSpPr/>
           <p:nvPr/>
         </p:nvSpPr>
@@ -4340,7 +4379,7 @@
       </p:sp>
       <p:sp>
         <p:nvSpPr>
-          <p:cNvPr id="10" name="Text 8"/>
+          <p:cNvPr id="11" name="Text 9"/>
           <p:cNvSpPr/>
           <p:nvPr/>
         </p:nvSpPr>
@@ -4379,7 +4418,7 @@
       </p:sp>
       <p:sp>
         <p:nvSpPr>
-          <p:cNvPr id="11" name="Text 9"/>
+          <p:cNvPr id="12" name="Text 10"/>
           <p:cNvSpPr/>
           <p:nvPr/>
         </p:nvSpPr>
@@ -4418,7 +4457,7 @@
       </p:sp>
       <p:sp>
         <p:nvSpPr>
-          <p:cNvPr id="12" name="Text 10"/>
+          <p:cNvPr id="13" name="Text 11"/>
           <p:cNvSpPr/>
           <p:nvPr/>
         </p:nvSpPr>
@@ -4457,7 +4496,7 @@
       </p:sp>
       <p:sp>
         <p:nvSpPr>
-          <p:cNvPr id="13" name="Shape 11"/>
+          <p:cNvPr id="14" name="Shape 12"/>
           <p:cNvSpPr/>
           <p:nvPr/>
         </p:nvSpPr>
@@ -4491,7 +4530,7 @@
       </p:sp>
       <p:sp>
         <p:nvSpPr>
-          <p:cNvPr id="14" name="Shape 12"/>
+          <p:cNvPr id="15" name="Shape 13"/>
           <p:cNvSpPr/>
           <p:nvPr/>
         </p:nvSpPr>
@@ -4511,7 +4550,7 @@
       </p:sp>
       <p:sp>
         <p:nvSpPr>
-          <p:cNvPr id="15" name="Text 13"/>
+          <p:cNvPr id="16" name="Text 14"/>
           <p:cNvSpPr/>
           <p:nvPr/>
         </p:nvSpPr>
@@ -4550,7 +4589,7 @@
       </p:sp>
       <p:sp>
         <p:nvSpPr>
-          <p:cNvPr id="16" name="Text 14"/>
+          <p:cNvPr id="17" name="Text 15"/>
           <p:cNvSpPr/>
           <p:nvPr/>
         </p:nvSpPr>
@@ -4589,7 +4628,7 @@
       </p:sp>
       <p:sp>
         <p:nvSpPr>
-          <p:cNvPr id="17" name="Text 15"/>
+          <p:cNvPr id="18" name="Text 16"/>
           <p:cNvSpPr/>
           <p:nvPr/>
         </p:nvSpPr>
@@ -4628,7 +4667,7 @@
       </p:sp>
       <p:sp>
         <p:nvSpPr>
-          <p:cNvPr id="18" name="Text 16"/>
+          <p:cNvPr id="19" name="Text 17"/>
           <p:cNvSpPr/>
           <p:nvPr/>
         </p:nvSpPr>
@@ -4667,7 +4706,7 @@
       </p:sp>
       <p:sp>
         <p:nvSpPr>
-          <p:cNvPr id="19" name="Shape 17"/>
+          <p:cNvPr id="20" name="Shape 18"/>
           <p:cNvSpPr/>
           <p:nvPr/>
         </p:nvSpPr>
@@ -4701,7 +4740,7 @@
       </p:sp>
       <p:sp>
         <p:nvSpPr>
-          <p:cNvPr id="20" name="Shape 18"/>
+          <p:cNvPr id="21" name="Shape 19"/>
           <p:cNvSpPr/>
           <p:nvPr/>
         </p:nvSpPr>
@@ -4721,7 +4760,7 @@
       </p:sp>
       <p:sp>
         <p:nvSpPr>
-          <p:cNvPr id="21" name="Text 19"/>
+          <p:cNvPr id="22" name="Text 20"/>
           <p:cNvSpPr/>
           <p:nvPr/>
         </p:nvSpPr>
@@ -4760,7 +4799,7 @@
       </p:sp>
       <p:sp>
         <p:nvSpPr>
-          <p:cNvPr id="22" name="Text 20"/>
+          <p:cNvPr id="23" name="Text 21"/>
           <p:cNvSpPr/>
           <p:nvPr/>
         </p:nvSpPr>
@@ -4799,7 +4838,7 @@
       </p:sp>
       <p:sp>
         <p:nvSpPr>
-          <p:cNvPr id="23" name="Text 21"/>
+          <p:cNvPr id="24" name="Text 22"/>
           <p:cNvSpPr/>
           <p:nvPr/>
         </p:nvSpPr>
@@ -4838,7 +4877,7 @@
       </p:sp>
       <p:sp>
         <p:nvSpPr>
-          <p:cNvPr id="24" name="Text 22"/>
+          <p:cNvPr id="25" name="Text 23"/>
           <p:cNvSpPr/>
           <p:nvPr/>
         </p:nvSpPr>
@@ -4877,7 +4916,7 @@
       </p:sp>
       <p:sp>
         <p:nvSpPr>
-          <p:cNvPr id="25" name="Shape 23"/>
+          <p:cNvPr id="26" name="Shape 24"/>
           <p:cNvSpPr/>
           <p:nvPr/>
         </p:nvSpPr>
@@ -4911,7 +4950,7 @@
       </p:sp>
       <p:sp>
         <p:nvSpPr>
-          <p:cNvPr id="26" name="Shape 24"/>
+          <p:cNvPr id="27" name="Shape 25"/>
           <p:cNvSpPr/>
           <p:nvPr/>
         </p:nvSpPr>
@@ -4931,7 +4970,7 @@
       </p:sp>
       <p:sp>
         <p:nvSpPr>
-          <p:cNvPr id="27" name="Text 25"/>
+          <p:cNvPr id="28" name="Text 26"/>
           <p:cNvSpPr/>
           <p:nvPr/>
         </p:nvSpPr>
@@ -4970,7 +5009,7 @@
       </p:sp>
       <p:sp>
         <p:nvSpPr>
-          <p:cNvPr id="28" name="Text 26"/>
+          <p:cNvPr id="29" name="Text 27"/>
           <p:cNvSpPr/>
           <p:nvPr/>
         </p:nvSpPr>
@@ -5009,7 +5048,7 @@
       </p:sp>
       <p:sp>
         <p:nvSpPr>
-          <p:cNvPr id="29" name="Text 27"/>
+          <p:cNvPr id="30" name="Text 28"/>
           <p:cNvSpPr/>
           <p:nvPr/>
         </p:nvSpPr>
@@ -5048,7 +5087,7 @@
       </p:sp>
       <p:sp>
         <p:nvSpPr>
-          <p:cNvPr id="30" name="Text 28"/>
+          <p:cNvPr id="31" name="Text 29"/>
           <p:cNvSpPr/>
           <p:nvPr/>
         </p:nvSpPr>
@@ -5087,7 +5126,7 @@
       </p:sp>
       <p:sp>
         <p:nvSpPr>
-          <p:cNvPr id="31" name="Shape 29"/>
+          <p:cNvPr id="32" name="Shape 30"/>
           <p:cNvSpPr/>
           <p:nvPr/>
         </p:nvSpPr>
@@ -5121,7 +5160,7 @@
       </p:sp>
       <p:sp>
         <p:nvSpPr>
-          <p:cNvPr id="32" name="Shape 30"/>
+          <p:cNvPr id="33" name="Shape 31"/>
           <p:cNvSpPr/>
           <p:nvPr/>
         </p:nvSpPr>
@@ -5141,7 +5180,7 @@
       </p:sp>
       <p:sp>
         <p:nvSpPr>
-          <p:cNvPr id="33" name="Text 31"/>
+          <p:cNvPr id="34" name="Text 32"/>
           <p:cNvSpPr/>
           <p:nvPr/>
         </p:nvSpPr>
@@ -5180,7 +5219,7 @@
       </p:sp>
       <p:sp>
         <p:nvSpPr>
-          <p:cNvPr id="34" name="Text 32"/>
+          <p:cNvPr id="35" name="Text 33"/>
           <p:cNvSpPr/>
           <p:nvPr/>
         </p:nvSpPr>
@@ -5219,7 +5258,7 @@
       </p:sp>
       <p:sp>
         <p:nvSpPr>
-          <p:cNvPr id="35" name="Text 33"/>
+          <p:cNvPr id="36" name="Text 34"/>
           <p:cNvSpPr/>
           <p:nvPr/>
         </p:nvSpPr>
@@ -5258,7 +5297,7 @@
       </p:sp>
       <p:sp>
         <p:nvSpPr>
-          <p:cNvPr id="36" name="Text 34"/>
+          <p:cNvPr id="37" name="Text 35"/>
           <p:cNvSpPr/>
           <p:nvPr/>
         </p:nvSpPr>
@@ -5578,8 +5617,8 @@
         </p:nvSpPr>
         <p:spPr>
           <a:xfrm>
-            <a:off x="640080" y="4663440"/>
-            <a:ext cx="10908792" cy="822960"/>
+            <a:off x="640080" y="4617720"/>
+            <a:ext cx="10908792" cy="914400"/>
           </a:xfrm>
           <a:prstGeom prst="rect">
             <a:avLst/>
@@ -5657,7 +5696,24 @@
                 <a:ea typeface="Pretendard" pitchFamily="34" charset="-122"/>
                 <a:cs typeface="Pretendard" pitchFamily="34" charset="-120"/>
               </a:rPr>
-              <a:t>광고형·B2B는 쓰는 사람과 내는 사람이 다릅니다.</a:t>
+              <a:t>광고형·B2B는 쓰는 사람과 내는 사람이 다릅니다. </a:t>
+            </a:r>
+            <a:pPr algn="ctr" indent="0" marL="0">
+              <a:lnSpc>
+                <a:spcPts val="2600"/>
+              </a:lnSpc>
+              <a:buNone/>
+            </a:pPr>
+            <a:r>
+              <a:rPr lang="en-US" sz="1700" b="1" dirty="0">
+                <a:solidFill>
+                  <a:srgbClr val="E8541B"/>
+                </a:solidFill>
+                <a:latin typeface="Pretendard" pitchFamily="34" charset="0"/>
+                <a:ea typeface="Pretendard" pitchFamily="34" charset="-122"/>
+                <a:cs typeface="Pretendard" pitchFamily="34" charset="-120"/>
+              </a:rPr>
+              <a:t>놓치면 수익 모델이 통째로 어긋나요.</a:t>
             </a:r>
             <a:endParaRPr lang="en-US" sz="1700" dirty="0"/>
           </a:p>
@@ -5988,8 +6044,8 @@
         </p:nvSpPr>
         <p:spPr>
           <a:xfrm>
-            <a:off x="1005840" y="3108960"/>
-            <a:ext cx="4572000" cy="1005840"/>
+            <a:off x="1005840" y="3063240"/>
+            <a:ext cx="4572000" cy="1143000"/>
           </a:xfrm>
           <a:prstGeom prst="rect">
             <a:avLst/>
@@ -6003,12 +6059,12 @@
           <a:p>
             <a:pPr indent="0" marL="0">
               <a:lnSpc>
-                <a:spcPts val="2000"/>
+                <a:spcPts val="1900"/>
               </a:lnSpc>
               <a:buNone/>
             </a:pPr>
             <a:r>
-              <a:rPr lang="en-US" sz="1450" dirty="0">
+              <a:rPr lang="en-US" sz="1400" dirty="0">
                 <a:solidFill>
                   <a:srgbClr val="4F4F4F"/>
                 </a:solidFill>
@@ -6016,9 +6072,9 @@
                 <a:ea typeface="Pretendard" pitchFamily="34" charset="-122"/>
                 <a:cs typeface="Pretendard" pitchFamily="34" charset="-120"/>
               </a:rPr>
-              <a:t>비즈니스 모델 전체를 한 장(9칸)에 정리하는 도구. BMC를 초기 검증용으로 줄인 버전이에요.</a:t>
-            </a:r>
-            <a:endParaRPr lang="en-US" sz="1450" dirty="0"/>
+              <a:t>비즈니스 모델 전체를 한 장(9칸)에 정리하는 도구. 9칸을 더 자세히 쓰는 게 BMC, 초기 검증용으로 줄인 게 린캔버스예요.</a:t>
+            </a:r>
+            <a:endParaRPr lang="en-US" sz="1400" dirty="0"/>
           </a:p>
         </p:txBody>
       </p:sp>
@@ -6524,7 +6580,7 @@
                 <a:ea typeface="Pretendard" pitchFamily="34" charset="-122"/>
                 <a:cs typeface="Pretendard" pitchFamily="34" charset="-120"/>
               </a:rPr>
-              <a:t>린캔버스 9칸 · 오른쪽 ‘돈’에 시간 쓰기</a:t>
+              <a:t>린캔버스 9칸 · ①→⑨ 순서대로 · 오른쪽 ‘돈’에 시간 쓰기</a:t>
             </a:r>
             <a:endParaRPr lang="en-US" sz="1350" dirty="0"/>
           </a:p>
@@ -8186,7 +8242,7 @@
         <p:spPr>
           <a:xfrm>
             <a:off x="640080" y="6108192"/>
-            <a:ext cx="8778240" cy="274320"/>
+            <a:ext cx="10241280" cy="274320"/>
           </a:xfrm>
           <a:prstGeom prst="rect">
             <a:avLst/>
@@ -8210,7 +8266,7 @@
                 <a:ea typeface="Pretendard" pitchFamily="34" charset="-122"/>
                 <a:cs typeface="Pretendard" pitchFamily="34" charset="-120"/>
               </a:rPr>
-              <a:t>수익원·비용 구조에 시간을 몰아 쓰고, 핵심 지표 칸은 비워둡니다 (다음 강의 후 채움).</a:t>
+              <a:t>①→⑨ 순서로 채웁니다. 수익원·비용 구조에 시간을 몰아 쓰고, 핵심 지표 칸은 비워둡니다 (다음 강의 후 채움).</a:t>
             </a:r>
             <a:endParaRPr lang="en-US" sz="1250" dirty="0"/>
           </a:p>
@@ -11343,12 +11399,12 @@
         </p:nvSpPr>
         <p:spPr>
           <a:xfrm>
-            <a:off x="640080" y="5120640"/>
-            <a:ext cx="10908792" cy="1005840"/>
+            <a:off x="640080" y="4892040"/>
+            <a:ext cx="10908792" cy="914400"/>
           </a:xfrm>
           <a:prstGeom prst="roundRect">
             <a:avLst>
-              <a:gd name="adj" fmla="val 8182"/>
+              <a:gd name="adj" fmla="val 9000"/>
             </a:avLst>
           </a:prstGeom>
           <a:solidFill>
@@ -11377,8 +11433,8 @@
         </p:nvSpPr>
         <p:spPr>
           <a:xfrm>
-            <a:off x="1097280" y="5120640"/>
-            <a:ext cx="9966960" cy="1005840"/>
+            <a:off x="1097280" y="4892040"/>
+            <a:ext cx="9966960" cy="914400"/>
           </a:xfrm>
           <a:prstGeom prst="rect">
             <a:avLst/>
@@ -11459,6 +11515,45 @@
               <a:t>  · LTV는 매출이 아니라 마진 기준.</a:t>
             </a:r>
             <a:endParaRPr lang="en-US" sz="1450" dirty="0"/>
+          </a:p>
+        </p:txBody>
+      </p:sp>
+      <p:sp>
+        <p:nvSpPr>
+          <p:cNvPr id="25" name="Text 23"/>
+          <p:cNvSpPr/>
+          <p:nvPr/>
+        </p:nvSpPr>
+        <p:spPr>
+          <a:xfrm>
+            <a:off x="640080" y="5943600"/>
+            <a:ext cx="10424160" cy="274320"/>
+          </a:xfrm>
+          <a:prstGeom prst="rect">
+            <a:avLst/>
+          </a:prstGeom>
+          <a:noFill/>
+          <a:ln/>
+        </p:spPr>
+        <p:txBody>
+          <a:bodyPr wrap="square" lIns="0" tIns="0" rIns="0" bIns="0" rtlCol="0" anchor="ctr"/>
+          <a:lstStyle/>
+          <a:p>
+            <a:pPr algn="l" indent="0" marL="0">
+              <a:buNone/>
+            </a:pPr>
+            <a:r>
+              <a:rPr lang="en-US" sz="1050" dirty="0">
+                <a:solidFill>
+                  <a:srgbClr val="8A93A2"/>
+                </a:solidFill>
+                <a:latin typeface="Pretendard" pitchFamily="34" charset="0"/>
+                <a:ea typeface="Pretendard" pitchFamily="34" charset="-122"/>
+                <a:cs typeface="Pretendard" pitchFamily="34" charset="-120"/>
+              </a:rPr>
+              <a:t>심화(이름만): CAC = 마케팅비 ÷ 새 유료고객 수 · LTV ≈ 고객당 매출 × 마진율 ÷ 이탈률(마진 기준) · 기여이익 · CAC 회수기간 · NRR</a:t>
+            </a:r>
+            <a:endParaRPr lang="en-US" sz="1050" dirty="0"/>
           </a:p>
         </p:txBody>
       </p:sp>
@@ -11666,7 +11761,46 @@
       </p:sp>
       <p:sp>
         <p:nvSpPr>
-          <p:cNvPr id="6" name="Shape 4"/>
+          <p:cNvPr id="6" name="Text 4"/>
+          <p:cNvSpPr/>
+          <p:nvPr/>
+        </p:nvSpPr>
+        <p:spPr>
+          <a:xfrm>
+            <a:off x="640080" y="1481328"/>
+            <a:ext cx="10908792" cy="457200"/>
+          </a:xfrm>
+          <a:prstGeom prst="rect">
+            <a:avLst/>
+          </a:prstGeom>
+          <a:noFill/>
+          <a:ln/>
+        </p:spPr>
+        <p:txBody>
+          <a:bodyPr wrap="square" lIns="0" tIns="0" rIns="0" bIns="0" rtlCol="0" anchor="ctr"/>
+          <a:lstStyle/>
+          <a:p>
+            <a:pPr indent="0" marL="0">
+              <a:buNone/>
+            </a:pPr>
+            <a:r>
+              <a:rPr lang="en-US" sz="1800" b="1" dirty="0">
+                <a:solidFill>
+                  <a:srgbClr val="141821"/>
+                </a:solidFill>
+                <a:latin typeface="Pretendard" pitchFamily="34" charset="0"/>
+                <a:ea typeface="Pretendard" pitchFamily="34" charset="-122"/>
+                <a:cs typeface="Pretendard" pitchFamily="34" charset="-120"/>
+              </a:rPr>
+              <a:t>수익 모델을 잘 골라도 가격을 틀리면 사업성이 무너집니다.</a:t>
+            </a:r>
+            <a:endParaRPr lang="en-US" sz="1800" dirty="0"/>
+          </a:p>
+        </p:txBody>
+      </p:sp>
+      <p:sp>
+        <p:nvSpPr>
+          <p:cNvPr id="7" name="Shape 5"/>
           <p:cNvSpPr/>
           <p:nvPr/>
         </p:nvSpPr>
@@ -11700,7 +11834,7 @@
       </p:sp>
       <p:sp>
         <p:nvSpPr>
-          <p:cNvPr id="7" name="Text 5"/>
+          <p:cNvPr id="8" name="Text 6"/>
           <p:cNvSpPr/>
           <p:nvPr/>
         </p:nvSpPr>
@@ -11739,7 +11873,7 @@
       </p:sp>
       <p:sp>
         <p:nvSpPr>
-          <p:cNvPr id="8" name="Shape 6"/>
+          <p:cNvPr id="9" name="Shape 7"/>
           <p:cNvSpPr/>
           <p:nvPr/>
         </p:nvSpPr>
@@ -11773,7 +11907,7 @@
       </p:sp>
       <p:sp>
         <p:nvSpPr>
-          <p:cNvPr id="9" name="Text 7"/>
+          <p:cNvPr id="10" name="Text 8"/>
           <p:cNvSpPr/>
           <p:nvPr/>
         </p:nvSpPr>
@@ -11812,7 +11946,7 @@
       </p:sp>
       <p:sp>
         <p:nvSpPr>
-          <p:cNvPr id="10" name="Text 8"/>
+          <p:cNvPr id="11" name="Text 9"/>
           <p:cNvSpPr/>
           <p:nvPr/>
         </p:nvSpPr>
@@ -11854,7 +11988,7 @@
       </p:sp>
       <p:sp>
         <p:nvSpPr>
-          <p:cNvPr id="11" name="Shape 9"/>
+          <p:cNvPr id="12" name="Shape 10"/>
           <p:cNvSpPr/>
           <p:nvPr/>
         </p:nvSpPr>
@@ -11888,7 +12022,7 @@
       </p:sp>
       <p:sp>
         <p:nvSpPr>
-          <p:cNvPr id="12" name="Text 10"/>
+          <p:cNvPr id="13" name="Text 11"/>
           <p:cNvSpPr/>
           <p:nvPr/>
         </p:nvSpPr>
@@ -11927,7 +12061,7 @@
       </p:sp>
       <p:sp>
         <p:nvSpPr>
-          <p:cNvPr id="13" name="Text 11"/>
+          <p:cNvPr id="14" name="Text 12"/>
           <p:cNvSpPr/>
           <p:nvPr/>
         </p:nvSpPr>
@@ -12163,7 +12297,7 @@
                 <a:ea typeface="Pretendard" pitchFamily="34" charset="-122"/>
                 <a:cs typeface="Pretendard" pitchFamily="34" charset="-120"/>
               </a:rPr>
-              <a:t>발표 전 점검</a:t>
+              <a:t>발표·기획서 점검 · 해커톤 발표 전</a:t>
             </a:r>
             <a:endParaRPr lang="en-US" sz="1350" dirty="0"/>
           </a:p>
@@ -13010,7 +13144,7 @@
                           <a:ea typeface="Pretendard" pitchFamily="34" charset="-122"/>
                           <a:cs typeface="Pretendard" pitchFamily="34" charset="-120"/>
                         </a:rPr>
-                        <a:t>“원가가 변하니 구독+종량제 결합 검토.”</a:t>
+                        <a:t>“AI 사용량에 원가가 연동되니 구독+종량제 결합 검토.”</a:t>
                       </a:r>
                       <a:endParaRPr lang="en-US" sz="1300" dirty="0">
                         <a:latin typeface="Pretendard" charset="0"/>
@@ -13941,8 +14075,8 @@
         </p:nvSpPr>
         <p:spPr>
           <a:xfrm>
-            <a:off x="640080" y="2971800"/>
-            <a:ext cx="10881360" cy="457200"/>
+            <a:off x="640080" y="2862072"/>
+            <a:ext cx="10881360" cy="658368"/>
           </a:xfrm>
           <a:prstGeom prst="rect">
             <a:avLst/>
@@ -13955,6 +14089,9 @@
           <a:lstStyle/>
           <a:p>
             <a:pPr indent="0" marL="0">
+              <a:lnSpc>
+                <a:spcPts val="2100"/>
+              </a:lnSpc>
               <a:buNone/>
             </a:pPr>
             <a:r>
@@ -13966,7 +14103,7 @@
                 <a:ea typeface="Pretendard" pitchFamily="34" charset="-122"/>
                 <a:cs typeface="Pretendard" pitchFamily="34" charset="-120"/>
               </a:rPr>
-              <a:t>좋은 기획은 화면을 잘 그리는 데서 끝나지 않습니다. 오늘은 그중 ‘돈’을 책임집니다.</a:t>
+              <a:t>좋은 기획은 화면을 잘 그리는 데서 끝나지 않습니다. 왜 쓰이고·왜 돈을 낼 만하고·어떻게 유지되는지까지 — 오늘은 그중 ‘돈’을 책임집니다.</a:t>
             </a:r>
             <a:endParaRPr lang="en-US" sz="1500" dirty="0"/>
           </a:p>
@@ -15045,7 +15182,7 @@
                 <a:ea typeface="Pretendard" pitchFamily="34" charset="-122"/>
                 <a:cs typeface="Pretendard" pitchFamily="34" charset="-120"/>
               </a:rPr>
-              <a:t>초점: ‘이 수익 모델, 그 고객에 맞아?’</a:t>
+              <a:t>초점: ‘이 수익 모델, 그 고객에 맞아?’ · ‘돈 내는 사람이 누구야?’</a:t>
             </a:r>
             <a:endParaRPr lang="en-US" sz="1450" dirty="0"/>
           </a:p>
@@ -15967,7 +16104,7 @@
                 <a:ea typeface="Pretendard" pitchFamily="34" charset="-122"/>
                 <a:cs typeface="Pretendard" pitchFamily="34" charset="-120"/>
               </a:rPr>
-              <a:t>그때 찾아본 ‘수익을 발생시키려 설계한 장치는 어디?’ — 오늘은 그게 무슨 종류이고, 왜 골랐고, 우리 서비스엔 뭐가 맞는지까지 갑니다.</a:t>
+              <a:t>1주차 역기획 5질문의 마지막 단계에서 찾아본 ‘수익 장치는 어디?’ — 오늘은 그게 무슨 종류이고, 왜 골랐고, 우리 서비스엔 뭐가 맞는지까지 갑니다.</a:t>
             </a:r>
             <a:endParaRPr lang="en-US" sz="1400" dirty="0"/>
           </a:p>
@@ -17160,13 +17297,52 @@
       </p:sp>
       <p:sp>
         <p:nvSpPr>
-          <p:cNvPr id="11" name="Shape 9"/>
-          <p:cNvSpPr/>
-          <p:nvPr/>
-        </p:nvSpPr>
-        <p:spPr>
-          <a:xfrm>
-            <a:off x="640080" y="3749040"/>
+          <p:cNvPr id="11" name="Text 9"/>
+          <p:cNvSpPr/>
+          <p:nvPr/>
+        </p:nvSpPr>
+        <p:spPr>
+          <a:xfrm>
+            <a:off x="640080" y="3584448"/>
+            <a:ext cx="10908792" cy="274320"/>
+          </a:xfrm>
+          <a:prstGeom prst="rect">
+            <a:avLst/>
+          </a:prstGeom>
+          <a:noFill/>
+          <a:ln/>
+        </p:spPr>
+        <p:txBody>
+          <a:bodyPr wrap="square" lIns="0" tIns="0" rIns="0" bIns="0" rtlCol="0" anchor="ctr"/>
+          <a:lstStyle/>
+          <a:p>
+            <a:pPr algn="ctr" indent="0" marL="0">
+              <a:buNone/>
+            </a:pPr>
+            <a:r>
+              <a:rPr lang="en-US" sz="1250" dirty="0">
+                <a:solidFill>
+                  <a:srgbClr val="8A93A2"/>
+                </a:solidFill>
+                <a:latin typeface="Pretendard" pitchFamily="34" charset="0"/>
+                <a:ea typeface="Pretendard" pitchFamily="34" charset="-122"/>
+                <a:cs typeface="Pretendard" pitchFamily="34" charset="-120"/>
+              </a:rPr>
+              <a:t>2주차 Why·Who·What·How가 BM의 뼈대 — 거기에 ‘어떻게 지속되는가(돈·비용)’를 더한 게 BM, 수익 모델은 그 마지막 칸 하나.</a:t>
+            </a:r>
+            <a:endParaRPr lang="en-US" sz="1250" dirty="0"/>
+          </a:p>
+        </p:txBody>
+      </p:sp>
+      <p:sp>
+        <p:nvSpPr>
+          <p:cNvPr id="12" name="Shape 10"/>
+          <p:cNvSpPr/>
+          <p:nvPr/>
+        </p:nvSpPr>
+        <p:spPr>
+          <a:xfrm>
+            <a:off x="640080" y="3977640"/>
             <a:ext cx="5303520" cy="2103120"/>
           </a:xfrm>
           <a:prstGeom prst="roundRect">
@@ -17194,13 +17370,13 @@
       </p:sp>
       <p:sp>
         <p:nvSpPr>
-          <p:cNvPr id="12" name="Text 10"/>
-          <p:cNvSpPr/>
-          <p:nvPr/>
-        </p:nvSpPr>
-        <p:spPr>
-          <a:xfrm>
-            <a:off x="1005840" y="4041648"/>
+          <p:cNvPr id="13" name="Text 11"/>
+          <p:cNvSpPr/>
+          <p:nvPr/>
+        </p:nvSpPr>
+        <p:spPr>
+          <a:xfrm>
+            <a:off x="1005840" y="4270248"/>
             <a:ext cx="4572000" cy="502920"/>
           </a:xfrm>
           <a:prstGeom prst="rect">
@@ -17233,13 +17409,13 @@
       </p:sp>
       <p:sp>
         <p:nvSpPr>
-          <p:cNvPr id="13" name="Text 11"/>
-          <p:cNvSpPr/>
-          <p:nvPr/>
-        </p:nvSpPr>
-        <p:spPr>
-          <a:xfrm>
-            <a:off x="1005840" y="4663440"/>
+          <p:cNvPr id="14" name="Text 12"/>
+          <p:cNvSpPr/>
+          <p:nvPr/>
+        </p:nvSpPr>
+        <p:spPr>
+          <a:xfrm>
+            <a:off x="1005840" y="4892040"/>
             <a:ext cx="4572000" cy="548640"/>
           </a:xfrm>
           <a:prstGeom prst="rect">
@@ -17272,13 +17448,13 @@
       </p:sp>
       <p:sp>
         <p:nvSpPr>
-          <p:cNvPr id="14" name="Text 12"/>
-          <p:cNvSpPr/>
-          <p:nvPr/>
-        </p:nvSpPr>
-        <p:spPr>
-          <a:xfrm>
-            <a:off x="1005840" y="5257800"/>
+          <p:cNvPr id="15" name="Text 13"/>
+          <p:cNvSpPr/>
+          <p:nvPr/>
+        </p:nvSpPr>
+        <p:spPr>
+          <a:xfrm>
+            <a:off x="1005840" y="5486400"/>
             <a:ext cx="4572000" cy="457200"/>
           </a:xfrm>
           <a:prstGeom prst="rect">
@@ -17325,13 +17501,13 @@
       </p:sp>
       <p:sp>
         <p:nvSpPr>
-          <p:cNvPr id="15" name="Shape 13"/>
-          <p:cNvSpPr/>
-          <p:nvPr/>
-        </p:nvSpPr>
-        <p:spPr>
-          <a:xfrm>
-            <a:off x="6245352" y="3749040"/>
+          <p:cNvPr id="16" name="Shape 14"/>
+          <p:cNvSpPr/>
+          <p:nvPr/>
+        </p:nvSpPr>
+        <p:spPr>
+          <a:xfrm>
+            <a:off x="6245352" y="3977640"/>
             <a:ext cx="5303520" cy="2103120"/>
           </a:xfrm>
           <a:prstGeom prst="roundRect">
@@ -17359,13 +17535,13 @@
       </p:sp>
       <p:sp>
         <p:nvSpPr>
-          <p:cNvPr id="16" name="Text 14"/>
-          <p:cNvSpPr/>
-          <p:nvPr/>
-        </p:nvSpPr>
-        <p:spPr>
-          <a:xfrm>
-            <a:off x="6611112" y="4041648"/>
+          <p:cNvPr id="17" name="Text 15"/>
+          <p:cNvSpPr/>
+          <p:nvPr/>
+        </p:nvSpPr>
+        <p:spPr>
+          <a:xfrm>
+            <a:off x="6611112" y="4270248"/>
             <a:ext cx="4572000" cy="502920"/>
           </a:xfrm>
           <a:prstGeom prst="rect">
@@ -17398,13 +17574,13 @@
       </p:sp>
       <p:sp>
         <p:nvSpPr>
-          <p:cNvPr id="17" name="Text 15"/>
-          <p:cNvSpPr/>
-          <p:nvPr/>
-        </p:nvSpPr>
-        <p:spPr>
-          <a:xfrm>
-            <a:off x="6611112" y="4663440"/>
+          <p:cNvPr id="18" name="Text 16"/>
+          <p:cNvSpPr/>
+          <p:nvPr/>
+        </p:nvSpPr>
+        <p:spPr>
+          <a:xfrm>
+            <a:off x="6611112" y="4892040"/>
             <a:ext cx="4572000" cy="548640"/>
           </a:xfrm>
           <a:prstGeom prst="rect">
@@ -17437,13 +17613,13 @@
       </p:sp>
       <p:sp>
         <p:nvSpPr>
-          <p:cNvPr id="18" name="Text 16"/>
-          <p:cNvSpPr/>
-          <p:nvPr/>
-        </p:nvSpPr>
-        <p:spPr>
-          <a:xfrm>
-            <a:off x="6611112" y="5257800"/>
+          <p:cNvPr id="19" name="Text 17"/>
+          <p:cNvSpPr/>
+          <p:nvPr/>
+        </p:nvSpPr>
+        <p:spPr>
+          <a:xfrm>
+            <a:off x="6611112" y="5486400"/>
             <a:ext cx="4572000" cy="457200"/>
           </a:xfrm>
           <a:prstGeom prst="rect">
@@ -18371,6 +18547,45 @@
           </a:p>
         </p:txBody>
       </p:sp>
+      <p:sp>
+        <p:nvSpPr>
+          <p:cNvPr id="7" name="Text 5"/>
+          <p:cNvSpPr/>
+          <p:nvPr/>
+        </p:nvSpPr>
+        <p:spPr>
+          <a:xfrm>
+            <a:off x="640080" y="2121408"/>
+            <a:ext cx="10908792" cy="274320"/>
+          </a:xfrm>
+          <a:prstGeom prst="rect">
+            <a:avLst/>
+          </a:prstGeom>
+          <a:noFill/>
+          <a:ln/>
+        </p:spPr>
+        <p:txBody>
+          <a:bodyPr wrap="square" lIns="0" tIns="0" rIns="0" bIns="0" rtlCol="0" anchor="ctr"/>
+          <a:lstStyle/>
+          <a:p>
+            <a:pPr indent="0" marL="0">
+              <a:buNone/>
+            </a:pPr>
+            <a:r>
+              <a:rPr lang="en-US" sz="1350" dirty="0">
+                <a:solidFill>
+                  <a:srgbClr val="4F4F4F"/>
+                </a:solidFill>
+                <a:latin typeface="Pretendard" pitchFamily="34" charset="0"/>
+                <a:ea typeface="Pretendard" pitchFamily="34" charset="-122"/>
+                <a:cs typeface="Pretendard" pitchFamily="34" charset="-120"/>
+              </a:rPr>
+              <a:t>새로 발명하는 게 아니라, 이미 있는 구조 중 우리에 맞는 걸 고르고 섞습니다 (보통 2~3개).</a:t>
+            </a:r>
+            <a:endParaRPr lang="en-US" sz="1350" dirty="0"/>
+          </a:p>
+        </p:txBody>
+      </p:sp>
       <p:graphicFrame>
         <p:nvGraphicFramePr>
           <p:cNvPr id="8" name="Table 0"/>
@@ -18386,7 +18601,7 @@
           </p:nvPr>
         </p:nvGraphicFramePr>
         <p:xfrm>
-          <a:off x="640080" y="2377440"/>
+          <a:off x="640080" y="2487168"/>
           <a:ext cx="10908792" cy="914400"/>
         </p:xfrm>
         <a:graphic>
@@ -18400,7 +18615,7 @@
                 <a:gridCol w="2651760"/>
                 <a:gridCol w="2130552"/>
               </a:tblGrid>
-              <a:tr h="420624">
+              <a:tr h="411480">
                 <a:tc>
                   <a:txBody>
                     <a:bodyPr/>
@@ -18742,7 +18957,7 @@
                   </a:tcPr>
                 </a:tc>
               </a:tr>
-              <a:tr h="420624">
+              <a:tr h="411480">
                 <a:tc>
                   <a:txBody>
                     <a:bodyPr/>
@@ -19084,7 +19299,7 @@
                   </a:tcPr>
                 </a:tc>
               </a:tr>
-              <a:tr h="420624">
+              <a:tr h="411480">
                 <a:tc>
                   <a:txBody>
                     <a:bodyPr/>
@@ -19426,7 +19641,7 @@
                   </a:tcPr>
                 </a:tc>
               </a:tr>
-              <a:tr h="420624">
+              <a:tr h="411480">
                 <a:tc>
                   <a:txBody>
                     <a:bodyPr/>
@@ -19768,7 +19983,7 @@
                   </a:tcPr>
                 </a:tc>
               </a:tr>
-              <a:tr h="420624">
+              <a:tr h="411480">
                 <a:tc>
                   <a:txBody>
                     <a:bodyPr/>
@@ -20110,7 +20325,7 @@
                   </a:tcPr>
                 </a:tc>
               </a:tr>
-              <a:tr h="420624">
+              <a:tr h="411480">
                 <a:tc>
                   <a:txBody>
                     <a:bodyPr/>
@@ -20452,7 +20667,7 @@
                   </a:tcPr>
                 </a:tc>
               </a:tr>
-              <a:tr h="420624">
+              <a:tr h="411480">
                 <a:tc>
                   <a:txBody>
                     <a:bodyPr/>
@@ -20794,7 +21009,7 @@
                   </a:tcPr>
                 </a:tc>
               </a:tr>
-              <a:tr h="420624">
+              <a:tr h="411480">
                 <a:tc>
                   <a:txBody>
                     <a:bodyPr/>
@@ -21136,7 +21351,7 @@
                   </a:tcPr>
                 </a:tc>
               </a:tr>
-              <a:tr h="420624">
+              <a:tr h="411480">
                 <a:tc>
                   <a:txBody>
                     <a:bodyPr/>
@@ -24604,7 +24819,21 @@
                 <a:ea typeface="Pretendard" pitchFamily="34" charset="-122"/>
                 <a:cs typeface="Pretendard" pitchFamily="34" charset="-120"/>
               </a:rPr>
-              <a:t>. 고객 행동·사용 빈도·원가에 맞는 걸 고르는 일.</a:t>
+              <a:t>. 고객 행동·사용 빈도·원가에 맞는 걸 고르는 일 </a:t>
+            </a:r>
+            <a:pPr indent="0" marL="0">
+              <a:buNone/>
+            </a:pPr>
+            <a:r>
+              <a:rPr lang="en-US" sz="1500" b="1" dirty="0">
+                <a:solidFill>
+                  <a:srgbClr val="E8541B"/>
+                </a:solidFill>
+                <a:latin typeface="Pretendard" pitchFamily="34" charset="0"/>
+                <a:ea typeface="Pretendard" pitchFamily="34" charset="-122"/>
+                <a:cs typeface="Pretendard" pitchFamily="34" charset="-120"/>
+              </a:rPr>
+              <a:t>(→ 다음, 고르는 5질문).</a:t>
             </a:r>
             <a:endParaRPr lang="en-US" sz="1500" dirty="0"/>
           </a:p>
@@ -24862,8 +25091,8 @@
         </p:nvSpPr>
         <p:spPr>
           <a:xfrm>
-            <a:off x="640080" y="2286000"/>
-            <a:ext cx="10881360" cy="411480"/>
+            <a:off x="640080" y="2240280"/>
+            <a:ext cx="10881360" cy="566928"/>
           </a:xfrm>
           <a:prstGeom prst="rect">
             <a:avLst/>
@@ -24876,10 +25105,13 @@
           <a:lstStyle/>
           <a:p>
             <a:pPr indent="0" marL="0">
-              <a:buNone/>
-            </a:pPr>
-            <a:r>
-              <a:rPr lang="en-US" sz="1500" dirty="0">
+              <a:lnSpc>
+                <a:spcPts val="2000"/>
+              </a:lnSpc>
+              <a:buNone/>
+            </a:pPr>
+            <a:r>
+              <a:rPr lang="en-US" sz="1450" dirty="0">
                 <a:solidFill>
                   <a:srgbClr val="4F4F4F"/>
                 </a:solidFill>
@@ -24887,9 +25119,9 @@
                 <a:ea typeface="Pretendard" pitchFamily="34" charset="-122"/>
                 <a:cs typeface="Pretendard" pitchFamily="34" charset="-120"/>
               </a:rPr>
-              <a:t>모두가 아는 앱 1개를 정하고(배달의민족·토스·유튜브·당근) 4가지를 같이 답해봅시다.</a:t>
-            </a:r>
-            <a:endParaRPr lang="en-US" sz="1500" dirty="0"/>
+              <a:t>1주차 역기획 5질문의 마지막(⑤ 수익 포인트)을 한 발 더 밀고 갑니다. 모두가 아는 앱 1개(배달의민족·토스·유튜브·당근)로 4가지를 같이 답해봅시다.</a:t>
+            </a:r>
+            <a:endParaRPr lang="en-US" sz="1450" dirty="0"/>
           </a:p>
         </p:txBody>
       </p:sp>
